--- a/documents/git_github_cours.pptx
+++ b/documents/git_github_cours.pptx
@@ -15391,6 +15391,17 @@
               <a:buChar char="•"/>
             </a:pPr>
             <a:r>
+              <a:rPr lang="en-US" sz="1350" dirty="0" err="1">
+                <a:solidFill>
+                  <a:srgbClr val="24292F"/>
+                </a:solidFill>
+                <a:latin typeface="Calibri" pitchFamily="34" charset="0"/>
+                <a:ea typeface="Calibri" pitchFamily="34" charset="-122"/>
+                <a:cs typeface="Calibri" pitchFamily="34" charset="-120"/>
+              </a:rPr>
+              <a:t>Initialiser</a:t>
+            </a:r>
+            <a:r>
               <a:rPr lang="en-US" sz="1350" dirty="0">
                 <a:solidFill>
                   <a:srgbClr val="24292F"/>
@@ -15399,9 +15410,60 @@
                 <a:ea typeface="Calibri" pitchFamily="34" charset="-122"/>
                 <a:cs typeface="Calibri" pitchFamily="34" charset="-120"/>
               </a:rPr>
-              <a:t>File &gt; New Project &gt; Version Control &gt; Git</a:t>
-            </a:r>
-            <a:endParaRPr lang="en-US" sz="1350" dirty="0"/>
+              <a:t> git via R : </a:t>
+            </a:r>
+            <a:r>
+              <a:rPr lang="fr-FR" altLang="fr-FR" sz="1350" dirty="0" err="1">
+                <a:solidFill>
+                  <a:srgbClr val="24292F"/>
+                </a:solidFill>
+                <a:latin typeface="Calibri" pitchFamily="34" charset="0"/>
+                <a:ea typeface="Calibri" pitchFamily="34" charset="-122"/>
+                <a:cs typeface="Calibri" pitchFamily="34" charset="-120"/>
+              </a:rPr>
+              <a:t>usethis</a:t>
+            </a:r>
+            <a:r>
+              <a:rPr lang="fr-FR" altLang="fr-FR" sz="1350" dirty="0">
+                <a:solidFill>
+                  <a:srgbClr val="24292F"/>
+                </a:solidFill>
+                <a:latin typeface="Calibri" pitchFamily="34" charset="0"/>
+                <a:ea typeface="Calibri" pitchFamily="34" charset="-122"/>
+                <a:cs typeface="Calibri" pitchFamily="34" charset="-120"/>
+              </a:rPr>
+              <a:t>::</a:t>
+            </a:r>
+            <a:r>
+              <a:rPr lang="fr-FR" altLang="fr-FR" sz="1350" dirty="0" err="1">
+                <a:solidFill>
+                  <a:srgbClr val="24292F"/>
+                </a:solidFill>
+                <a:latin typeface="Calibri" pitchFamily="34" charset="0"/>
+                <a:ea typeface="Calibri" pitchFamily="34" charset="-122"/>
+                <a:cs typeface="Calibri" pitchFamily="34" charset="-120"/>
+              </a:rPr>
+              <a:t>use_git</a:t>
+            </a:r>
+            <a:r>
+              <a:rPr lang="fr-FR" altLang="fr-FR" sz="1350" dirty="0">
+                <a:solidFill>
+                  <a:srgbClr val="24292F"/>
+                </a:solidFill>
+                <a:latin typeface="Calibri" pitchFamily="34" charset="0"/>
+                <a:ea typeface="Calibri" pitchFamily="34" charset="-122"/>
+                <a:cs typeface="Calibri" pitchFamily="34" charset="-120"/>
+              </a:rPr>
+              <a:t>() </a:t>
+            </a:r>
+            <a:endParaRPr lang="en-US" sz="1350" dirty="0">
+              <a:solidFill>
+                <a:srgbClr val="24292F"/>
+              </a:solidFill>
+              <a:latin typeface="Calibri" pitchFamily="34" charset="0"/>
+              <a:ea typeface="Calibri" pitchFamily="34" charset="-122"/>
+              <a:cs typeface="Calibri" pitchFamily="34" charset="-120"/>
+            </a:endParaRPr>
           </a:p>
           <a:p>
             <a:pPr marL="228600" indent="-228600">
@@ -15420,9 +15482,30 @@
                 <a:ea typeface="Calibri" pitchFamily="34" charset="-122"/>
                 <a:cs typeface="Calibri" pitchFamily="34" charset="-120"/>
               </a:rPr>
-              <a:t>Onglet Git : statut, commit, pull/push, branches</a:t>
-            </a:r>
-            <a:endParaRPr lang="en-US" sz="1350" dirty="0"/>
+              <a:t>Onglet Git : </a:t>
+            </a:r>
+            <a:r>
+              <a:rPr lang="en-US" sz="1350" dirty="0" err="1">
+                <a:solidFill>
+                  <a:srgbClr val="24292F"/>
+                </a:solidFill>
+                <a:latin typeface="Calibri" pitchFamily="34" charset="0"/>
+                <a:ea typeface="Calibri" pitchFamily="34" charset="-122"/>
+                <a:cs typeface="Calibri" pitchFamily="34" charset="-120"/>
+              </a:rPr>
+              <a:t>statut</a:t>
+            </a:r>
+            <a:r>
+              <a:rPr lang="en-US" sz="1350" dirty="0">
+                <a:solidFill>
+                  <a:srgbClr val="24292F"/>
+                </a:solidFill>
+                <a:latin typeface="Calibri" pitchFamily="34" charset="0"/>
+                <a:ea typeface="Calibri" pitchFamily="34" charset="-122"/>
+                <a:cs typeface="Calibri" pitchFamily="34" charset="-120"/>
+              </a:rPr>
+              <a:t>, commit, pull/push, branches</a:t>
+            </a:r>
           </a:p>
         </p:txBody>
       </p:sp>

--- a/documents/git_github_cours.pptx
+++ b/documents/git_github_cours.pptx
@@ -10995,7 +10995,7 @@
                 <a:ea typeface="Calibri" pitchFamily="34" charset="-122"/>
                 <a:cs typeface="Calibri" pitchFamily="34" charset="-120"/>
               </a:rPr>
-              <a:t>RStudio &amp; JupyterLab</a:t>
+              <a:t>RStudio</a:t>
             </a:r>
             <a:endParaRPr lang="en-US" sz="1600" dirty="0"/>
           </a:p>
